--- a/slides/EDA-Pokemon-Rodeyro.pptx
+++ b/slides/EDA-Pokemon-Rodeyro.pptx
@@ -6,8 +6,8 @@
   </p:sldMasterIdLst>
   <p:sldIdLst>
     <p:sldId id="256" r:id="rId7"/>
-    <p:sldId id="257" r:id="rId8"/>
-    <p:sldId id="258" r:id="rId9"/>
+    <p:sldId id="257" r:id="rId9"/>
+    <p:sldId id="258" r:id="rId10"/>
   </p:sldIdLst>
   <p:sldSz cx="12191695" cy="6858000" type="screen4x3"/>
   <p:notesSz cx="6858000" cy="9144000"/>
@@ -107,6 +107,880 @@
     </a:lvl9pPr>
   </p:defaultTextStyle>
 </p:presentation>
+</file>
+
+<file path=ppt/notesMasters/notesMaster1.xml><?xml version="1.0" encoding="utf-8"?>
+<p:notesMaster xmlns:a="http://schemas.openxmlformats.org/drawingml/2006/main" xmlns:p="http://schemas.openxmlformats.org/presentationml/2006/main" xmlns:r="http://schemas.openxmlformats.org/officeDocument/2006/relationships">
+  <p:cSld>
+    <p:bg>
+      <p:bgRef idx="1001">
+        <a:schemeClr val="bg1"/>
+      </p:bgRef>
+    </p:bg>
+    <p:spTree>
+      <p:nvGrpSpPr>
+        <p:cNvPr id="1" name=""/>
+        <p:cNvGrpSpPr/>
+        <p:nvPr/>
+      </p:nvGrpSpPr>
+      <p:grpSpPr>
+        <a:xfrm>
+          <a:off x="0" y="0"/>
+          <a:ext cx="0" cy="0"/>
+          <a:chOff x="0" y="0"/>
+          <a:chExt cx="0" cy="0"/>
+        </a:xfrm>
+      </p:grpSpPr>
+      <p:sp>
+        <p:nvSpPr>
+          <p:cNvPr id="2" name="Header Placeholder 1"/>
+          <p:cNvSpPr>
+            <a:spLocks noGrp="1"/>
+          </p:cNvSpPr>
+          <p:nvPr>
+            <p:ph type="hdr" sz="quarter"/>
+          </p:nvPr>
+        </p:nvSpPr>
+        <p:spPr>
+          <a:xfrm>
+            <a:off x="0" y="0"/>
+            <a:ext cx="2971800" cy="457200"/>
+          </a:xfrm>
+          <a:prstGeom prst="rect">
+            <a:avLst/>
+          </a:prstGeom>
+        </p:spPr>
+        <p:txBody>
+          <a:bodyPr vert="horz" lIns="91440" tIns="45720" rIns="91440" bIns="45720" rtlCol="0"/>
+          <a:lstStyle>
+            <a:lvl1pPr algn="l">
+              <a:defRPr sz="1200"/>
+            </a:lvl1pPr>
+          </a:lstStyle>
+          <a:p>
+            <a:endParaRPr lang="en-US"/>
+          </a:p>
+        </p:txBody>
+      </p:sp>
+      <p:sp>
+        <p:nvSpPr>
+          <p:cNvPr id="3" name="Date Placeholder 2"/>
+          <p:cNvSpPr>
+            <a:spLocks noGrp="1"/>
+          </p:cNvSpPr>
+          <p:nvPr>
+            <p:ph type="dt" idx="1"/>
+          </p:nvPr>
+        </p:nvSpPr>
+        <p:spPr>
+          <a:xfrm>
+            <a:off x="3884613" y="0"/>
+            <a:ext cx="2971800" cy="457200"/>
+          </a:xfrm>
+          <a:prstGeom prst="rect">
+            <a:avLst/>
+          </a:prstGeom>
+        </p:spPr>
+        <p:txBody>
+          <a:bodyPr vert="horz" lIns="91440" tIns="45720" rIns="91440" bIns="45720" rtlCol="0"/>
+          <a:lstStyle>
+            <a:lvl1pPr algn="r">
+              <a:defRPr sz="1200"/>
+            </a:lvl1pPr>
+          </a:lstStyle>
+          <a:p>
+            <a:fld id="{0F89C1C7-3DCD-1040-A9CF-14679D8B5DDD}" type="datetimeFigureOut">
+              <a:rPr lang="en-US" smtClean="0"/>
+              <a:t>10/17/16</a:t>
+            </a:fld>
+            <a:endParaRPr lang="en-US"/>
+          </a:p>
+        </p:txBody>
+      </p:sp>
+      <p:sp>
+        <p:nvSpPr>
+          <p:cNvPr id="4" name="Slide Image Placeholder 3"/>
+          <p:cNvSpPr>
+            <a:spLocks noGrp="1" noRot="1" noChangeAspect="1"/>
+          </p:cNvSpPr>
+          <p:nvPr>
+            <p:ph type="sldImg" idx="2"/>
+          </p:nvPr>
+        </p:nvSpPr>
+        <p:spPr>
+          <a:xfrm>
+            <a:off x="1143000" y="685800"/>
+            <a:ext cx="4572000" cy="3429000"/>
+          </a:xfrm>
+          <a:prstGeom prst="rect">
+            <a:avLst/>
+          </a:prstGeom>
+          <a:noFill/>
+          <a:ln w="12700">
+            <a:solidFill>
+              <a:prstClr val="black"/>
+            </a:solidFill>
+          </a:ln>
+        </p:spPr>
+        <p:txBody>
+          <a:bodyPr vert="horz" lIns="91440" tIns="45720" rIns="91440" bIns="45720" rtlCol="0" anchor="ctr"/>
+          <a:lstStyle/>
+          <a:p>
+            <a:endParaRPr lang="en-US"/>
+          </a:p>
+        </p:txBody>
+      </p:sp>
+      <p:sp>
+        <p:nvSpPr>
+          <p:cNvPr id="5" name="Notes Placeholder 4"/>
+          <p:cNvSpPr>
+            <a:spLocks noGrp="1"/>
+          </p:cNvSpPr>
+          <p:nvPr>
+            <p:ph type="body" sz="quarter" idx="3"/>
+          </p:nvPr>
+        </p:nvSpPr>
+        <p:spPr>
+          <a:xfrm>
+            <a:off x="685800" y="4343400"/>
+            <a:ext cx="5486400" cy="4114800"/>
+          </a:xfrm>
+          <a:prstGeom prst="rect">
+            <a:avLst/>
+          </a:prstGeom>
+        </p:spPr>
+        <p:txBody>
+          <a:bodyPr vert="horz" lIns="91440" tIns="45720" rIns="91440" bIns="45720" rtlCol="0"/>
+          <a:lstStyle/>
+          <a:p>
+            <a:pPr lvl="0"/>
+            <a:r>
+              <a:rPr lang="en-US" smtClean="0"/>
+              <a:t>Click to edit Master text styles</a:t>
+            </a:r>
+          </a:p>
+          <a:p>
+            <a:pPr lvl="1"/>
+            <a:r>
+              <a:rPr lang="en-US" smtClean="0"/>
+              <a:t>Second level</a:t>
+            </a:r>
+          </a:p>
+          <a:p>
+            <a:pPr lvl="2"/>
+            <a:r>
+              <a:rPr lang="en-US" smtClean="0"/>
+              <a:t>Third level</a:t>
+            </a:r>
+          </a:p>
+          <a:p>
+            <a:pPr lvl="3"/>
+            <a:r>
+              <a:rPr lang="en-US" smtClean="0"/>
+              <a:t>Fourth level</a:t>
+            </a:r>
+          </a:p>
+          <a:p>
+            <a:pPr lvl="4"/>
+            <a:r>
+              <a:rPr lang="en-US" smtClean="0"/>
+              <a:t>Fifth level</a:t>
+            </a:r>
+            <a:endParaRPr lang="en-US"/>
+          </a:p>
+        </p:txBody>
+      </p:sp>
+      <p:sp>
+        <p:nvSpPr>
+          <p:cNvPr id="6" name="Footer Placeholder 5"/>
+          <p:cNvSpPr>
+            <a:spLocks noGrp="1"/>
+          </p:cNvSpPr>
+          <p:nvPr>
+            <p:ph type="ftr" sz="quarter" idx="4"/>
+          </p:nvPr>
+        </p:nvSpPr>
+        <p:spPr>
+          <a:xfrm>
+            <a:off x="0" y="8685213"/>
+            <a:ext cx="2971800" cy="457200"/>
+          </a:xfrm>
+          <a:prstGeom prst="rect">
+            <a:avLst/>
+          </a:prstGeom>
+        </p:spPr>
+        <p:txBody>
+          <a:bodyPr vert="horz" lIns="91440" tIns="45720" rIns="91440" bIns="45720" rtlCol="0" anchor="b"/>
+          <a:lstStyle>
+            <a:lvl1pPr algn="l">
+              <a:defRPr sz="1200"/>
+            </a:lvl1pPr>
+          </a:lstStyle>
+          <a:p>
+            <a:endParaRPr lang="en-US"/>
+          </a:p>
+        </p:txBody>
+      </p:sp>
+      <p:sp>
+        <p:nvSpPr>
+          <p:cNvPr id="7" name="Slide Number Placeholder 6"/>
+          <p:cNvSpPr>
+            <a:spLocks noGrp="1"/>
+          </p:cNvSpPr>
+          <p:nvPr>
+            <p:ph type="sldNum" sz="quarter" idx="5"/>
+          </p:nvPr>
+        </p:nvSpPr>
+        <p:spPr>
+          <a:xfrm>
+            <a:off x="3884613" y="8685213"/>
+            <a:ext cx="2971800" cy="457200"/>
+          </a:xfrm>
+          <a:prstGeom prst="rect">
+            <a:avLst/>
+          </a:prstGeom>
+        </p:spPr>
+        <p:txBody>
+          <a:bodyPr vert="horz" lIns="91440" tIns="45720" rIns="91440" bIns="45720" rtlCol="0" anchor="b"/>
+          <a:lstStyle>
+            <a:lvl1pPr algn="r">
+              <a:defRPr sz="1200"/>
+            </a:lvl1pPr>
+          </a:lstStyle>
+          <a:p>
+            <a:fld id="{BB5E49A5-4136-284D-997B-48E1D791AD67}" type="slidenum">
+              <a:rPr lang="en-US" smtClean="0"/>
+              <a:t>‹#›</a:t>
+            </a:fld>
+            <a:endParaRPr lang="en-US"/>
+          </a:p>
+        </p:txBody>
+      </p:sp>
+    </p:spTree>
+    <p:extLst>
+      <p:ext uri="{BB962C8B-B14F-4D97-AF65-F5344CB8AC3E}">
+        <p14:creationId xmlns:p14="http://schemas.microsoft.com/office/powerpoint/2010/main" val="2623252185"/>
+      </p:ext>
+    </p:extLst>
+  </p:cSld>
+  <p:clrMap bg1="lt1" tx1="dk1" bg2="lt2" tx2="dk2" accent1="accent1" accent2="accent2" accent3="accent3" accent4="accent4" accent5="accent5" accent6="accent6" hlink="hlink" folHlink="folHlink"/>
+  <p:notesStyle>
+    <a:lvl1pPr marL="0" algn="l" defTabSz="457200" rtl="0" eaLnBrk="1" latinLnBrk="0" hangingPunct="1">
+      <a:defRPr sz="1200" kern="1200">
+        <a:solidFill>
+          <a:schemeClr val="tx1"/>
+        </a:solidFill>
+        <a:latin typeface="+mn-lt"/>
+        <a:ea typeface="+mn-ea"/>
+        <a:cs typeface="+mn-cs"/>
+      </a:defRPr>
+    </a:lvl1pPr>
+    <a:lvl2pPr marL="457200" algn="l" defTabSz="457200" rtl="0" eaLnBrk="1" latinLnBrk="0" hangingPunct="1">
+      <a:defRPr sz="1200" kern="1200">
+        <a:solidFill>
+          <a:schemeClr val="tx1"/>
+        </a:solidFill>
+        <a:latin typeface="+mn-lt"/>
+        <a:ea typeface="+mn-ea"/>
+        <a:cs typeface="+mn-cs"/>
+      </a:defRPr>
+    </a:lvl2pPr>
+    <a:lvl3pPr marL="914400" algn="l" defTabSz="457200" rtl="0" eaLnBrk="1" latinLnBrk="0" hangingPunct="1">
+      <a:defRPr sz="1200" kern="1200">
+        <a:solidFill>
+          <a:schemeClr val="tx1"/>
+        </a:solidFill>
+        <a:latin typeface="+mn-lt"/>
+        <a:ea typeface="+mn-ea"/>
+        <a:cs typeface="+mn-cs"/>
+      </a:defRPr>
+    </a:lvl3pPr>
+    <a:lvl4pPr marL="1371600" algn="l" defTabSz="457200" rtl="0" eaLnBrk="1" latinLnBrk="0" hangingPunct="1">
+      <a:defRPr sz="1200" kern="1200">
+        <a:solidFill>
+          <a:schemeClr val="tx1"/>
+        </a:solidFill>
+        <a:latin typeface="+mn-lt"/>
+        <a:ea typeface="+mn-ea"/>
+        <a:cs typeface="+mn-cs"/>
+      </a:defRPr>
+    </a:lvl4pPr>
+    <a:lvl5pPr marL="1828800" algn="l" defTabSz="457200" rtl="0" eaLnBrk="1" latinLnBrk="0" hangingPunct="1">
+      <a:defRPr sz="1200" kern="1200">
+        <a:solidFill>
+          <a:schemeClr val="tx1"/>
+        </a:solidFill>
+        <a:latin typeface="+mn-lt"/>
+        <a:ea typeface="+mn-ea"/>
+        <a:cs typeface="+mn-cs"/>
+      </a:defRPr>
+    </a:lvl5pPr>
+    <a:lvl6pPr marL="2286000" algn="l" defTabSz="457200" rtl="0" eaLnBrk="1" latinLnBrk="0" hangingPunct="1">
+      <a:defRPr sz="1200" kern="1200">
+        <a:solidFill>
+          <a:schemeClr val="tx1"/>
+        </a:solidFill>
+        <a:latin typeface="+mn-lt"/>
+        <a:ea typeface="+mn-ea"/>
+        <a:cs typeface="+mn-cs"/>
+      </a:defRPr>
+    </a:lvl6pPr>
+    <a:lvl7pPr marL="2743200" algn="l" defTabSz="457200" rtl="0" eaLnBrk="1" latinLnBrk="0" hangingPunct="1">
+      <a:defRPr sz="1200" kern="1200">
+        <a:solidFill>
+          <a:schemeClr val="tx1"/>
+        </a:solidFill>
+        <a:latin typeface="+mn-lt"/>
+        <a:ea typeface="+mn-ea"/>
+        <a:cs typeface="+mn-cs"/>
+      </a:defRPr>
+    </a:lvl7pPr>
+    <a:lvl8pPr marL="3200400" algn="l" defTabSz="457200" rtl="0" eaLnBrk="1" latinLnBrk="0" hangingPunct="1">
+      <a:defRPr sz="1200" kern="1200">
+        <a:solidFill>
+          <a:schemeClr val="tx1"/>
+        </a:solidFill>
+        <a:latin typeface="+mn-lt"/>
+        <a:ea typeface="+mn-ea"/>
+        <a:cs typeface="+mn-cs"/>
+      </a:defRPr>
+    </a:lvl8pPr>
+    <a:lvl9pPr marL="3657600" algn="l" defTabSz="457200" rtl="0" eaLnBrk="1" latinLnBrk="0" hangingPunct="1">
+      <a:defRPr sz="1200" kern="1200">
+        <a:solidFill>
+          <a:schemeClr val="tx1"/>
+        </a:solidFill>
+        <a:latin typeface="+mn-lt"/>
+        <a:ea typeface="+mn-ea"/>
+        <a:cs typeface="+mn-cs"/>
+      </a:defRPr>
+    </a:lvl9pPr>
+  </p:notesStyle>
+</p:notesMaster>
+</file>
+
+<file path=ppt/notesSlides/notesSlide1.xml><?xml version="1.0" encoding="utf-8"?>
+<p:notes xmlns:a="http://schemas.openxmlformats.org/drawingml/2006/main" xmlns:p="http://schemas.openxmlformats.org/presentationml/2006/main" xmlns:r="http://schemas.openxmlformats.org/officeDocument/2006/relationships">
+  <p:cSld>
+    <p:spTree>
+      <p:nvGrpSpPr>
+        <p:cNvPr id="1" name=""/>
+        <p:cNvGrpSpPr/>
+        <p:nvPr/>
+      </p:nvGrpSpPr>
+      <p:grpSpPr>
+        <a:xfrm>
+          <a:off x="0" y="0"/>
+          <a:ext cx="0" cy="0"/>
+          <a:chOff x="0" y="0"/>
+          <a:chExt cx="0" cy="0"/>
+        </a:xfrm>
+      </p:grpSpPr>
+      <p:sp>
+        <p:nvSpPr>
+          <p:cNvPr id="2" name="Slide Image Placeholder 1"/>
+          <p:cNvSpPr>
+            <a:spLocks noGrp="1"/>
+          </p:cNvSpPr>
+          <p:nvPr>
+            <p:ph type="sldImg" idx="2"/>
+          </p:nvPr>
+        </p:nvSpPr>
+        <p:spPr/>
+      </p:sp>
+      <p:sp>
+        <p:nvSpPr>
+          <p:cNvPr id="3" name="Notes Placeholder 2"/>
+          <p:cNvSpPr>
+            <a:spLocks noGrp="1"/>
+          </p:cNvSpPr>
+          <p:nvPr>
+            <p:ph type="body" idx="3" sz="quarter"/>
+          </p:nvPr>
+        </p:nvSpPr>
+        <p:spPr/>
+        <p:txBody>
+          <a:bodyPr/>
+          <a:lstStyle/>
+          <a:p>
+            <a:r>
+              <a:t>[30 segundos — no te quedes acá]</a:t>
+            </a:r>
+          </a:p>
+          <a:p/>
+          <a:p>
+            <a:r>
+              <a:t>"Buenas. Soy Agustín Rodeyro y voy a presentar el análisis exploratorio del dataset de</a:t>
+            </a:r>
+          </a:p>
+          <a:p>
+            <a:r>
+              <a:t>Pokémon de Kaggle: 800 registros, 13 columnas, 6 generaciones. El notebook completo está</a:t>
+            </a:r>
+          </a:p>
+          <a:p>
+            <a:r>
+              <a:t>en el repositorio que figura abajo a la derecha."</a:t>
+            </a:r>
+          </a:p>
+          <a:p/>
+          <a:p>
+            <a:r>
+              <a:t>"El trabajo tiene dos partes: primero caracterizo el dataset y muestro tres rarezas en</a:t>
+            </a:r>
+          </a:p>
+          <a:p>
+            <a:r>
+              <a:t>cómo está construido; después analizo los outliers y justifico qué hacer con ellos."</a:t>
+            </a:r>
+          </a:p>
+          <a:p/>
+          <a:p>
+            <a:r>
+              <a:t>[Pasá a la siguiente]</a:t>
+            </a:r>
+          </a:p>
+        </p:txBody>
+      </p:sp>
+      <p:sp>
+        <p:nvSpPr>
+          <p:cNvPr id="4" name="Slide Number Placeholder 3"/>
+          <p:cNvSpPr>
+            <a:spLocks noGrp="1"/>
+          </p:cNvSpPr>
+          <p:nvPr>
+            <p:ph type="sldNum" idx="5" sz="quarter"/>
+          </p:nvPr>
+        </p:nvSpPr>
+        <p:spPr/>
+      </p:sp>
+    </p:spTree>
+  </p:cSld>
+  <p:clrMapOvr>
+    <a:masterClrMapping/>
+  </p:clrMapOvr>
+</p:notes>
+</file>
+
+<file path=ppt/notesSlides/notesSlide2.xml><?xml version="1.0" encoding="utf-8"?>
+<p:notes xmlns:a="http://schemas.openxmlformats.org/drawingml/2006/main" xmlns:p="http://schemas.openxmlformats.org/presentationml/2006/main" xmlns:r="http://schemas.openxmlformats.org/officeDocument/2006/relationships">
+  <p:cSld>
+    <p:spTree>
+      <p:nvGrpSpPr>
+        <p:cNvPr id="1" name=""/>
+        <p:cNvGrpSpPr/>
+        <p:nvPr/>
+      </p:nvGrpSpPr>
+      <p:grpSpPr>
+        <a:xfrm>
+          <a:off x="0" y="0"/>
+          <a:ext cx="0" cy="0"/>
+          <a:chOff x="0" y="0"/>
+          <a:chExt cx="0" cy="0"/>
+        </a:xfrm>
+      </p:grpSpPr>
+      <p:sp>
+        <p:nvSpPr>
+          <p:cNvPr id="2" name="Slide Image Placeholder 1"/>
+          <p:cNvSpPr>
+            <a:spLocks noGrp="1"/>
+          </p:cNvSpPr>
+          <p:nvPr>
+            <p:ph type="sldImg" idx="2"/>
+          </p:nvPr>
+        </p:nvSpPr>
+        <p:spPr/>
+      </p:sp>
+      <p:sp>
+        <p:nvSpPr>
+          <p:cNvPr id="3" name="Notes Placeholder 2"/>
+          <p:cNvSpPr>
+            <a:spLocks noGrp="1"/>
+          </p:cNvSpPr>
+          <p:nvPr>
+            <p:ph type="body" idx="3" sz="quarter"/>
+          </p:nvPr>
+        </p:nvSpPr>
+        <p:spPr/>
+        <p:txBody>
+          <a:bodyPr/>
+          <a:lstStyle/>
+          <a:p>
+            <a:r>
+              <a:t>[3 a 4 minutos]</a:t>
+            </a:r>
+          </a:p>
+          <a:p/>
+          <a:p>
+            <a:r>
+              <a:t>— ABRIR CON LA FICHA —</a:t>
+            </a:r>
+          </a:p>
+          <a:p>
+            <a:r>
+              <a:t>"El dataset son 800 filas por 13 columnas, 179 KB: entra entero en memoria. Seis</a:t>
+            </a:r>
+          </a:p>
+          <a:p>
+            <a:r>
+              <a:t>variables numéricas que son las stats base, una derivada que es Total, tres categóricas,</a:t>
+            </a:r>
+          </a:p>
+          <a:p>
+            <a:r>
+              <a:t>una booleana y dos identificadores."</a:t>
+            </a:r>
+          </a:p>
+          <a:p/>
+          <a:p>
+            <a:r>
+              <a:t>"Lo primero que sorprende es que está limpio: cero duplicados exactos y cero nulos</a:t>
+            </a:r>
+          </a:p>
+          <a:p>
+            <a:r>
+              <a:t>reales."</a:t>
+            </a:r>
+          </a:p>
+          <a:p/>
+          <a:p>
+            <a:r>
+              <a:t>— EL GANCHO —</a:t>
+            </a:r>
+          </a:p>
+          <a:p>
+            <a:r>
+              <a:t>"Pero tiene tres rarezas en cómo está construido."</a:t>
+            </a:r>
+          </a:p>
+          <a:p/>
+          <a:p>
+            <a:r>
+              <a:t>— RAREZA 1 (señalá la barra naranja del gráfico) —</a:t>
+            </a:r>
+          </a:p>
+          <a:p>
+            <a:r>
+              <a:t>"Type 2 tiene 386 nulos, casi la mitad del dataset. Parece el problema de calidad más</a:t>
+            </a:r>
+          </a:p>
+          <a:p>
+            <a:r>
+              <a:t>obvio, pero no lo es: son Pokémon mono-tipo. La ausencia de un segundo tipo ES el dato.</a:t>
+            </a:r>
+          </a:p>
+          <a:p>
+            <a:r>
+              <a:t>Si hiciera un dropna borraría el 48 % del dataset sin motivo. Es la diferencia entre un</a:t>
+            </a:r>
+          </a:p>
+          <a:p>
+            <a:r>
+              <a:t>valor faltante y uno que no aplica."</a:t>
+            </a:r>
+          </a:p>
+          <a:p/>
+          <a:p>
+            <a:r>
+              <a:t>— RAREZA 2 —</a:t>
+            </a:r>
+          </a:p>
+          <a:p>
+            <a:r>
+              <a:t>"El numeral no es clave primaria: hay 800 filas pero solo 721 números distintos. Las 49</a:t>
+            </a:r>
+          </a:p>
+          <a:p>
+            <a:r>
+              <a:t>formas Mega comparten el número de Pokédex con su forma base: Charizard, Mega Charizard X</a:t>
+            </a:r>
+          </a:p>
+          <a:p>
+            <a:r>
+              <a:t>y Mega Charizard Y son los tres el número 6."</a:t>
+            </a:r>
+          </a:p>
+          <a:p/>
+          <a:p>
+            <a:r>
+              <a:t>— RAREZA 3 —</a:t>
+            </a:r>
+          </a:p>
+          <a:p>
+            <a:r>
+              <a:t>"Y Total es una columna derivada. Verifiqué que en las 800 filas es exactamente la suma</a:t>
+            </a:r>
+          </a:p>
+          <a:p>
+            <a:r>
+              <a:t>de las seis stats, sin una sola excepción. Por eso en el heatmap correlaciona entre 0,6 y</a:t>
+            </a:r>
+          </a:p>
+          <a:p>
+            <a:r>
+              <a:t>0,75 con todas: no es un hallazgo, es aritmética. Y para modelar, usar Total junto a las</a:t>
+            </a:r>
+          </a:p>
+          <a:p>
+            <a:r>
+              <a:t>seis stats sería multicolinealidad perfecta."</a:t>
+            </a:r>
+          </a:p>
+          <a:p/>
+          <a:p>
+            <a:r>
+              <a:t>[Pasá a la siguiente]</a:t>
+            </a:r>
+          </a:p>
+        </p:txBody>
+      </p:sp>
+      <p:sp>
+        <p:nvSpPr>
+          <p:cNvPr id="4" name="Slide Number Placeholder 3"/>
+          <p:cNvSpPr>
+            <a:spLocks noGrp="1"/>
+          </p:cNvSpPr>
+          <p:nvPr>
+            <p:ph type="sldNum" idx="5" sz="quarter"/>
+          </p:nvPr>
+        </p:nvSpPr>
+        <p:spPr/>
+      </p:sp>
+    </p:spTree>
+  </p:cSld>
+  <p:clrMapOvr>
+    <a:masterClrMapping/>
+  </p:clrMapOvr>
+</p:notes>
+</file>
+
+<file path=ppt/notesSlides/notesSlide3.xml><?xml version="1.0" encoding="utf-8"?>
+<p:notes xmlns:a="http://schemas.openxmlformats.org/drawingml/2006/main" xmlns:p="http://schemas.openxmlformats.org/presentationml/2006/main" xmlns:r="http://schemas.openxmlformats.org/officeDocument/2006/relationships">
+  <p:cSld>
+    <p:spTree>
+      <p:nvGrpSpPr>
+        <p:cNvPr id="1" name=""/>
+        <p:cNvGrpSpPr/>
+        <p:nvPr/>
+      </p:nvGrpSpPr>
+      <p:grpSpPr>
+        <a:xfrm>
+          <a:off x="0" y="0"/>
+          <a:ext cx="0" cy="0"/>
+          <a:chOff x="0" y="0"/>
+          <a:chExt cx="0" cy="0"/>
+        </a:xfrm>
+      </p:grpSpPr>
+      <p:sp>
+        <p:nvSpPr>
+          <p:cNvPr id="2" name="Slide Image Placeholder 1"/>
+          <p:cNvSpPr>
+            <a:spLocks noGrp="1"/>
+          </p:cNvSpPr>
+          <p:nvPr>
+            <p:ph type="sldImg" idx="2"/>
+          </p:nvPr>
+        </p:nvSpPr>
+        <p:spPr/>
+      </p:sp>
+      <p:sp>
+        <p:nvSpPr>
+          <p:cNvPr id="3" name="Notes Placeholder 2"/>
+          <p:cNvSpPr>
+            <a:spLocks noGrp="1"/>
+          </p:cNvSpPr>
+          <p:nvPr>
+            <p:ph type="body" idx="3" sz="quarter"/>
+          </p:nvPr>
+        </p:nvSpPr>
+        <p:spPr/>
+        <p:txBody>
+          <a:bodyPr/>
+          <a:lstStyle/>
+          <a:p>
+            <a:r>
+              <a:t>[4 a 5 minutos — es la diapo que más pesa]</a:t>
+            </a:r>
+          </a:p>
+          <a:p/>
+          <a:p>
+            <a:r>
+              <a:t>— DETECCIÓN —</a:t>
+            </a:r>
+          </a:p>
+          <a:p>
+            <a:r>
+              <a:t>"Para los outliers apliqué la regla del IQR de Tukey con k igual a 1,5: se marca todo lo</a:t>
+            </a:r>
+          </a:p>
+          <a:p>
+            <a:r>
+              <a:t>que caiga fuera de Q1 menos 1,5 por el rango intercuartílico, y Q3 más 1,5. Dieron 52</a:t>
+            </a:r>
+          </a:p>
+          <a:p>
+            <a:r>
+              <a:t>Pokémon, el 6,5 %, outliers en al menos una stat. Ninguna stat individual supera el 2,4 %,</a:t>
+            </a:r>
+          </a:p>
+          <a:p>
+            <a:r>
+              <a:t>lo que descarta errores sistemáticos de carga."</a:t>
+            </a:r>
+          </a:p>
+          <a:p/>
+          <a:p>
+            <a:r>
+              <a:t>— EL REMATE (bajá la velocidad acá) —</a:t>
+            </a:r>
+          </a:p>
+          <a:p>
+            <a:r>
+              <a:t>"Pero acá está lo interesante: Total no tiene ningún outlier, aunque sus seis componentes</a:t>
+            </a:r>
+          </a:p>
+          <a:p>
+            <a:r>
+              <a:t>sí tienen."</a:t>
+            </a:r>
+          </a:p>
+          <a:p/>
+          <a:p>
+            <a:r>
+              <a:t>"El caso que lo explica es Shuckle: tiene 230 de defensa y 230 de defensa especial, los</a:t>
+            </a:r>
+          </a:p>
+          <a:p>
+            <a:r>
+              <a:t>dos máximos del dataset, pero 5 de velocidad y 10 de ataque. Suma 505, que es un Pokémon</a:t>
+            </a:r>
+          </a:p>
+          <a:p>
+            <a:r>
+              <a:t>del montón."</a:t>
+            </a:r>
+          </a:p>
+          <a:p/>
+          <a:p>
+            <a:r>
+              <a:t>"O sea: los outliers de este dataset no son de poder, son de perfil. El juego reparte un</a:t>
+            </a:r>
+          </a:p>
+          <a:p>
+            <a:r>
+              <a:t>presupuesto fijo de puntos, y si te destacás en algo lo pagás en otra cosa."</a:t>
+            </a:r>
+          </a:p>
+          <a:p/>
+          <a:p>
+            <a:r>
+              <a:t>— NATURALEZA —</a:t>
+            </a:r>
+          </a:p>
+          <a:p>
+            <a:r>
+              <a:t>"Después miré quiénes son, porque eso es lo que decide si se eliminan. Shedinja tiene 1 de</a:t>
+            </a:r>
+          </a:p>
+          <a:p>
+            <a:r>
+              <a:t>HP: es el único outlier por debajo del límite en las 800 filas y las seis stats. Y no es</a:t>
+            </a:r>
+          </a:p>
+          <a:p>
+            <a:r>
+              <a:t>un error de carga: en el juego tiene una habilidad que lo hace casi invulnerable, así que</a:t>
+            </a:r>
+          </a:p>
+          <a:p>
+            <a:r>
+              <a:t>le pusieron un punto de vida a propósito. El valor más anómalo del dataset es diseño</a:t>
+            </a:r>
+          </a:p>
+          <a:p>
+            <a:r>
+              <a:t>deliberado."</a:t>
+            </a:r>
+          </a:p>
+          <a:p/>
+          <a:p>
+            <a:r>
+              <a:t>— LA DECISIÓN —</a:t>
+            </a:r>
+          </a:p>
+          <a:p>
+            <a:r>
+              <a:t>"Por eso no los elimino. El 36,5 % de los outliers son legendarios, cuando en el dataset</a:t>
+            </a:r>
+          </a:p>
+          <a:p>
+            <a:r>
+              <a:t>entero son el 8,1 %: están 4,5 veces sobrerrepresentados. Ser extremo es lo que define a</a:t>
+            </a:r>
+          </a:p>
+          <a:p>
+            <a:r>
+              <a:t>un legendario. Si los borrara perdería 19 de los 65, el 29 % de la clase minoritaria."</a:t>
+            </a:r>
+          </a:p>
+          <a:p/>
+          <a:p>
+            <a:r>
+              <a:t>"Acá el outlier es la señal, no el ruido."</a:t>
+            </a:r>
+          </a:p>
+          <a:p/>
+          <a:p>
+            <a:r>
+              <a:t>— CIERRE —</a:t>
+            </a:r>
+          </a:p>
+          <a:p>
+            <a:r>
+              <a:t>"Y esa es la conclusión general: este dataset no tiene problemas de calidad, tiene</a:t>
+            </a:r>
+          </a:p>
+          <a:p>
+            <a:r>
+              <a:t>desafíos de estructura. Multicolinealidad, alta cardinalidad en los tipos, desbalance de</a:t>
+            </a:r>
+          </a:p>
+          <a:p>
+            <a:r>
+              <a:t>clase y casi-duplicados por las formas alternativas. Por eso las técnicas que propongo son</a:t>
+            </a:r>
+          </a:p>
+          <a:p>
+            <a:r>
+              <a:t>RobustScaler, split agrupado por número de Pokédex, y stratify con métricas F1 o recall."</a:t>
+            </a:r>
+          </a:p>
+          <a:p/>
+          <a:p>
+            <a:r>
+              <a:t>"Gracias, quedo para preguntas."</a:t>
+            </a:r>
+          </a:p>
+        </p:txBody>
+      </p:sp>
+      <p:sp>
+        <p:nvSpPr>
+          <p:cNvPr id="4" name="Slide Number Placeholder 3"/>
+          <p:cNvSpPr>
+            <a:spLocks noGrp="1"/>
+          </p:cNvSpPr>
+          <p:nvPr>
+            <p:ph type="sldNum" idx="5" sz="quarter"/>
+          </p:nvPr>
+        </p:nvSpPr>
+        <p:spPr/>
+      </p:sp>
+    </p:spTree>
+  </p:cSld>
+  <p:clrMapOvr>
+    <a:masterClrMapping/>
+  </p:clrMapOvr>
+</p:notes>
 </file>
 
 <file path=ppt/slideLayouts/slideLayout1.xml><?xml version="1.0" encoding="utf-8"?>
@@ -4940,4 +5814,324 @@
   </a:objectDefaults>
   <a:extraClrSchemeLst/>
 </a:theme>
+</file>
+
+<file path=ppt/theme/theme2.xml><?xml version="1.0" encoding="utf-8"?>
+<a:theme xmlns:a="http://schemas.openxmlformats.org/drawingml/2006/main" name="Office Theme">
+  <a:themeElements>
+    <a:clrScheme name="Office">
+      <a:dk1>
+        <a:sysClr val="windowText" lastClr="000000"/>
+      </a:dk1>
+      <a:lt1>
+        <a:sysClr val="window" lastClr="FFFFFF"/>
+      </a:lt1>
+      <a:dk2>
+        <a:srgbClr val="1F497D"/>
+      </a:dk2>
+      <a:lt2>
+        <a:srgbClr val="EEECE1"/>
+      </a:lt2>
+      <a:accent1>
+        <a:srgbClr val="4F81BD"/>
+      </a:accent1>
+      <a:accent2>
+        <a:srgbClr val="C0504D"/>
+      </a:accent2>
+      <a:accent3>
+        <a:srgbClr val="9BBB59"/>
+      </a:accent3>
+      <a:accent4>
+        <a:srgbClr val="8064A2"/>
+      </a:accent4>
+      <a:accent5>
+        <a:srgbClr val="4BACC6"/>
+      </a:accent5>
+      <a:accent6>
+        <a:srgbClr val="F79646"/>
+      </a:accent6>
+      <a:hlink>
+        <a:srgbClr val="0000FF"/>
+      </a:hlink>
+      <a:folHlink>
+        <a:srgbClr val="800080"/>
+      </a:folHlink>
+    </a:clrScheme>
+    <a:fontScheme name="Office">
+      <a:majorFont>
+        <a:latin typeface="Calibri"/>
+        <a:ea typeface=""/>
+        <a:cs typeface=""/>
+        <a:font script="Jpan" typeface="ＭＳ Ｐゴシック"/>
+        <a:font script="Hang" typeface="맑은 고딕"/>
+        <a:font script="Hans" typeface="宋体"/>
+        <a:font script="Hant" typeface="新細明體"/>
+        <a:font script="Arab" typeface="Times New Roman"/>
+        <a:font script="Hebr" typeface="Times New Roman"/>
+        <a:font script="Thai" typeface="Angsana New"/>
+        <a:font script="Ethi" typeface="Nyala"/>
+        <a:font script="Beng" typeface="Vrinda"/>
+        <a:font script="Gujr" typeface="Shruti"/>
+        <a:font script="Khmr" typeface="MoolBoran"/>
+        <a:font script="Knda" typeface="Tunga"/>
+        <a:font script="Guru" typeface="Raavi"/>
+        <a:font script="Cans" typeface="Euphemia"/>
+        <a:font script="Cher" typeface="Plantagenet Cherokee"/>
+        <a:font script="Yiii" typeface="Microsoft Yi Baiti"/>
+        <a:font script="Tibt" typeface="Microsoft Himalaya"/>
+        <a:font script="Thaa" typeface="MV Boli"/>
+        <a:font script="Deva" typeface="Mangal"/>
+        <a:font script="Telu" typeface="Gautami"/>
+        <a:font script="Taml" typeface="Latha"/>
+        <a:font script="Syrc" typeface="Estrangelo Edessa"/>
+        <a:font script="Orya" typeface="Kalinga"/>
+        <a:font script="Mlym" typeface="Kartika"/>
+        <a:font script="Laoo" typeface="DokChampa"/>
+        <a:font script="Sinh" typeface="Iskoola Pota"/>
+        <a:font script="Mong" typeface="Mongolian Baiti"/>
+        <a:font script="Viet" typeface="Times New Roman"/>
+        <a:font script="Uigh" typeface="Microsoft Uighur"/>
+        <a:font script="Geor" typeface="Sylfaen"/>
+      </a:majorFont>
+      <a:minorFont>
+        <a:latin typeface="Calibri"/>
+        <a:ea typeface=""/>
+        <a:cs typeface=""/>
+        <a:font script="Jpan" typeface="ＭＳ Ｐゴシック"/>
+        <a:font script="Hang" typeface="맑은 고딕"/>
+        <a:font script="Hans" typeface="宋体"/>
+        <a:font script="Hant" typeface="新細明體"/>
+        <a:font script="Arab" typeface="Arial"/>
+        <a:font script="Hebr" typeface="Arial"/>
+        <a:font script="Thai" typeface="Cordia New"/>
+        <a:font script="Ethi" typeface="Nyala"/>
+        <a:font script="Beng" typeface="Vrinda"/>
+        <a:font script="Gujr" typeface="Shruti"/>
+        <a:font script="Khmr" typeface="DaunPenh"/>
+        <a:font script="Knda" typeface="Tunga"/>
+        <a:font script="Guru" typeface="Raavi"/>
+        <a:font script="Cans" typeface="Euphemia"/>
+        <a:font script="Cher" typeface="Plantagenet Cherokee"/>
+        <a:font script="Yiii" typeface="Microsoft Yi Baiti"/>
+        <a:font script="Tibt" typeface="Microsoft Himalaya"/>
+        <a:font script="Thaa" typeface="MV Boli"/>
+        <a:font script="Deva" typeface="Mangal"/>
+        <a:font script="Telu" typeface="Gautami"/>
+        <a:font script="Taml" typeface="Latha"/>
+        <a:font script="Syrc" typeface="Estrangelo Edessa"/>
+        <a:font script="Orya" typeface="Kalinga"/>
+        <a:font script="Mlym" typeface="Kartika"/>
+        <a:font script="Laoo" typeface="DokChampa"/>
+        <a:font script="Sinh" typeface="Iskoola Pota"/>
+        <a:font script="Mong" typeface="Mongolian Baiti"/>
+        <a:font script="Viet" typeface="Arial"/>
+        <a:font script="Uigh" typeface="Microsoft Uighur"/>
+        <a:font script="Geor" typeface="Sylfaen"/>
+      </a:minorFont>
+    </a:fontScheme>
+    <a:fmtScheme name="Office">
+      <a:fillStyleLst>
+        <a:solidFill>
+          <a:schemeClr val="phClr"/>
+        </a:solidFill>
+        <a:gradFill rotWithShape="1">
+          <a:gsLst>
+            <a:gs pos="0">
+              <a:schemeClr val="phClr">
+                <a:tint val="50000"/>
+                <a:satMod val="300000"/>
+              </a:schemeClr>
+            </a:gs>
+            <a:gs pos="35000">
+              <a:schemeClr val="phClr">
+                <a:tint val="37000"/>
+                <a:satMod val="300000"/>
+              </a:schemeClr>
+            </a:gs>
+            <a:gs pos="100000">
+              <a:schemeClr val="phClr">
+                <a:tint val="15000"/>
+                <a:satMod val="350000"/>
+              </a:schemeClr>
+            </a:gs>
+          </a:gsLst>
+          <a:lin ang="16200000" scaled="1"/>
+        </a:gradFill>
+        <a:gradFill rotWithShape="1">
+          <a:gsLst>
+            <a:gs pos="0">
+              <a:schemeClr val="phClr">
+                <a:tint val="100000"/>
+                <a:shade val="100000"/>
+                <a:satMod val="130000"/>
+              </a:schemeClr>
+            </a:gs>
+            <a:gs pos="100000">
+              <a:schemeClr val="phClr">
+                <a:tint val="50000"/>
+                <a:shade val="100000"/>
+                <a:satMod val="350000"/>
+              </a:schemeClr>
+            </a:gs>
+          </a:gsLst>
+          <a:lin ang="16200000" scaled="0"/>
+        </a:gradFill>
+      </a:fillStyleLst>
+      <a:lnStyleLst>
+        <a:ln w="9525" cap="flat" cmpd="sng" algn="ctr">
+          <a:solidFill>
+            <a:schemeClr val="phClr">
+              <a:shade val="95000"/>
+              <a:satMod val="105000"/>
+            </a:schemeClr>
+          </a:solidFill>
+          <a:prstDash val="solid"/>
+        </a:ln>
+        <a:ln w="25400" cap="flat" cmpd="sng" algn="ctr">
+          <a:solidFill>
+            <a:schemeClr val="phClr"/>
+          </a:solidFill>
+          <a:prstDash val="solid"/>
+        </a:ln>
+        <a:ln w="38100" cap="flat" cmpd="sng" algn="ctr">
+          <a:solidFill>
+            <a:schemeClr val="phClr"/>
+          </a:solidFill>
+          <a:prstDash val="solid"/>
+        </a:ln>
+      </a:lnStyleLst>
+      <a:effectStyleLst>
+        <a:effectStyle>
+          <a:effectLst>
+            <a:outerShdw blurRad="40000" dist="20000" dir="5400000" rotWithShape="0">
+              <a:srgbClr val="000000">
+                <a:alpha val="38000"/>
+              </a:srgbClr>
+            </a:outerShdw>
+          </a:effectLst>
+        </a:effectStyle>
+        <a:effectStyle>
+          <a:effectLst>
+            <a:outerShdw blurRad="40000" dist="23000" dir="5400000" rotWithShape="0">
+              <a:srgbClr val="000000">
+                <a:alpha val="35000"/>
+              </a:srgbClr>
+            </a:outerShdw>
+          </a:effectLst>
+        </a:effectStyle>
+        <a:effectStyle>
+          <a:effectLst>
+            <a:outerShdw blurRad="40000" dist="23000" dir="5400000" rotWithShape="0">
+              <a:srgbClr val="000000">
+                <a:alpha val="35000"/>
+              </a:srgbClr>
+            </a:outerShdw>
+          </a:effectLst>
+          <a:scene3d>
+            <a:camera prst="orthographicFront">
+              <a:rot lat="0" lon="0" rev="0"/>
+            </a:camera>
+            <a:lightRig rig="threePt" dir="t">
+              <a:rot lat="0" lon="0" rev="1200000"/>
+            </a:lightRig>
+          </a:scene3d>
+          <a:sp3d>
+            <a:bevelT w="63500" h="25400"/>
+          </a:sp3d>
+        </a:effectStyle>
+      </a:effectStyleLst>
+      <a:bgFillStyleLst>
+        <a:solidFill>
+          <a:schemeClr val="phClr"/>
+        </a:solidFill>
+        <a:gradFill rotWithShape="1">
+          <a:gsLst>
+            <a:gs pos="0">
+              <a:schemeClr val="phClr">
+                <a:tint val="40000"/>
+                <a:satMod val="350000"/>
+              </a:schemeClr>
+            </a:gs>
+            <a:gs pos="40000">
+              <a:schemeClr val="phClr">
+                <a:tint val="45000"/>
+                <a:shade val="99000"/>
+                <a:satMod val="350000"/>
+              </a:schemeClr>
+            </a:gs>
+            <a:gs pos="100000">
+              <a:schemeClr val="phClr">
+                <a:shade val="20000"/>
+                <a:satMod val="255000"/>
+              </a:schemeClr>
+            </a:gs>
+          </a:gsLst>
+          <a:path path="circle">
+            <a:fillToRect l="50000" t="-80000" r="50000" b="180000"/>
+          </a:path>
+        </a:gradFill>
+        <a:gradFill rotWithShape="1">
+          <a:gsLst>
+            <a:gs pos="0">
+              <a:schemeClr val="phClr">
+                <a:tint val="80000"/>
+                <a:satMod val="300000"/>
+              </a:schemeClr>
+            </a:gs>
+            <a:gs pos="100000">
+              <a:schemeClr val="phClr">
+                <a:shade val="30000"/>
+                <a:satMod val="200000"/>
+              </a:schemeClr>
+            </a:gs>
+          </a:gsLst>
+          <a:path path="circle">
+            <a:fillToRect l="50000" t="50000" r="50000" b="50000"/>
+          </a:path>
+        </a:gradFill>
+      </a:bgFillStyleLst>
+    </a:fmtScheme>
+  </a:themeElements>
+  <a:objectDefaults>
+    <a:spDef>
+      <a:spPr/>
+      <a:bodyPr/>
+      <a:lstStyle/>
+      <a:style>
+        <a:lnRef idx="1">
+          <a:schemeClr val="accent1"/>
+        </a:lnRef>
+        <a:fillRef idx="3">
+          <a:schemeClr val="accent1"/>
+        </a:fillRef>
+        <a:effectRef idx="2">
+          <a:schemeClr val="accent1"/>
+        </a:effectRef>
+        <a:fontRef idx="minor">
+          <a:schemeClr val="lt1"/>
+        </a:fontRef>
+      </a:style>
+    </a:spDef>
+    <a:lnDef>
+      <a:spPr/>
+      <a:bodyPr/>
+      <a:lstStyle/>
+      <a:style>
+        <a:lnRef idx="2">
+          <a:schemeClr val="accent1"/>
+        </a:lnRef>
+        <a:fillRef idx="0">
+          <a:schemeClr val="accent1"/>
+        </a:fillRef>
+        <a:effectRef idx="1">
+          <a:schemeClr val="accent1"/>
+        </a:effectRef>
+        <a:fontRef idx="minor">
+          <a:schemeClr val="tx1"/>
+        </a:fontRef>
+      </a:style>
+    </a:lnDef>
+  </a:objectDefaults>
+  <a:extraClrSchemeLst/>
+</a:theme>
 </file>
--- a/slides/EDA-Pokemon-Rodeyro.pptx
+++ b/slides/EDA-Pokemon-Rodeyro.pptx
@@ -510,28 +510,28 @@
           <a:p/>
           <a:p>
             <a:r>
-              <a:t>"Buenas. Soy Agustín Rodeyro y voy a presentar el análisis exploratorio del dataset de</a:t>
-            </a:r>
-          </a:p>
-          <a:p>
-            <a:r>
-              <a:t>Pokémon de Kaggle: 800 registros, 13 columnas, 6 generaciones. El notebook completo está</a:t>
-            </a:r>
-          </a:p>
-          <a:p>
-            <a:r>
-              <a:t>en el repositorio que figura abajo a la derecha."</a:t>
+              <a:t>"Bueno, buenas. Yo elegí el dataset de Pokémon, lo saqué de Kaggle. Son 800 filas,</a:t>
+            </a:r>
+          </a:p>
+          <a:p>
+            <a:r>
+              <a:t>13 columnas, y cubre las primeras seis generaciones."</a:t>
             </a:r>
           </a:p>
           <a:p/>
           <a:p>
             <a:r>
-              <a:t>"El trabajo tiene dos partes: primero caracterizo el dataset y muestro tres rarezas en</a:t>
-            </a:r>
-          </a:p>
-          <a:p>
-            <a:r>
-              <a:t>cómo está construido; después analizo los outliers y justifico qué hacer con ellos."</a:t>
+              <a:t>"Voy a mostrar dos cosas: primero cómo está armado el dataset, porque tiene un par de</a:t>
+            </a:r>
+          </a:p>
+          <a:p>
+            <a:r>
+              <a:t>cosas raras que no se ven a simple vista; y después el análisis de outliers, que fue lo</a:t>
+            </a:r>
+          </a:p>
+          <a:p>
+            <a:r>
+              <a:t>que más me sorprendió."</a:t>
             </a:r>
           </a:p>
           <a:p/>
@@ -613,117 +613,168 @@
           <a:p/>
           <a:p>
             <a:r>
-              <a:t>— ABRIR CON LA FICHA —</a:t>
-            </a:r>
-          </a:p>
-          <a:p>
-            <a:r>
-              <a:t>"El dataset son 800 filas por 13 columnas, 179 KB: entra entero en memoria. Seis</a:t>
-            </a:r>
-          </a:p>
-          <a:p>
-            <a:r>
-              <a:t>variables numéricas que son las stats base, una derivada que es Total, tres categóricas,</a:t>
-            </a:r>
-          </a:p>
-          <a:p>
-            <a:r>
-              <a:t>una booleana y dos identificadores."</a:t>
+              <a:t>— ARRANCÁ POR LO BÁSICO —</a:t>
+            </a:r>
+          </a:p>
+          <a:p>
+            <a:r>
+              <a:t>"Primero lo general: son 800 filas por 13 columnas, ocupa 179 KB. O sea que es chiquito,</a:t>
+            </a:r>
+          </a:p>
+          <a:p>
+            <a:r>
+              <a:t>entra entero en memoria sin ningún problema."</a:t>
             </a:r>
           </a:p>
           <a:p/>
           <a:p>
             <a:r>
-              <a:t>"Lo primero que sorprende es que está limpio: cero duplicados exactos y cero nulos</a:t>
-            </a:r>
-          </a:p>
-          <a:p>
-            <a:r>
-              <a:t>reales."</a:t>
+              <a:t>"De las columnas, seis son las stats del Pokémon —vida, ataque, defensa y las dos</a:t>
+            </a:r>
+          </a:p>
+          <a:p>
+            <a:r>
+              <a:t>especiales, más velocidad—. Después está Total, tres categóricas, una booleana que dice</a:t>
+            </a:r>
+          </a:p>
+          <a:p>
+            <a:r>
+              <a:t>si es legendario, y dos que son identificadores."</a:t>
             </a:r>
           </a:p>
           <a:p/>
           <a:p>
             <a:r>
-              <a:t>— EL GANCHO —</a:t>
-            </a:r>
-          </a:p>
-          <a:p>
-            <a:r>
-              <a:t>"Pero tiene tres rarezas en cómo está construido."</a:t>
+              <a:t>"Lo primero que hice fue buscar problemas de calidad. Y la verdad que no encontré: no hay</a:t>
+            </a:r>
+          </a:p>
+          <a:p>
+            <a:r>
+              <a:t>filas duplicadas, no hay nombres repetidos. Está limpio."</a:t>
             </a:r>
           </a:p>
           <a:p/>
           <a:p>
             <a:r>
+              <a:t>— EL GANCHO (hacé una pausa acá) —</a:t>
+            </a:r>
+          </a:p>
+          <a:p>
+            <a:r>
+              <a:t>"Pero cuando me puse a mirar bien cómo está construido, aparecieron tres cosas."</a:t>
+            </a:r>
+          </a:p>
+          <a:p/>
+          <a:p>
+            <a:r>
               <a:t>— RAREZA 1 (señalá la barra naranja del gráfico) —</a:t>
             </a:r>
           </a:p>
           <a:p>
             <a:r>
-              <a:t>"Type 2 tiene 386 nulos, casi la mitad del dataset. Parece el problema de calidad más</a:t>
-            </a:r>
-          </a:p>
-          <a:p>
-            <a:r>
-              <a:t>obvio, pero no lo es: son Pokémon mono-tipo. La ausencia de un segundo tipo ES el dato.</a:t>
-            </a:r>
-          </a:p>
-          <a:p>
-            <a:r>
-              <a:t>Si hiciera un dropna borraría el 48 % del dataset sin motivo. Es la diferencia entre un</a:t>
-            </a:r>
-          </a:p>
-          <a:p>
-            <a:r>
-              <a:t>valor faltante y uno que no aplica."</a:t>
+              <a:t>"La primera es esta barra de acá. Type 2 tiene 386 nulos, casi la mitad del dataset. Al</a:t>
+            </a:r>
+          </a:p>
+          <a:p>
+            <a:r>
+              <a:t>principio pensé «bueno, acá hay un problema de datos faltantes»."</a:t>
             </a:r>
           </a:p>
           <a:p/>
           <a:p>
             <a:r>
+              <a:t>"Pero no. Esos 386 son Pokémon que tienen un solo tipo. O sea, el nulo no es que falte el</a:t>
+            </a:r>
+          </a:p>
+          <a:p>
+            <a:r>
+              <a:t>dato, es que no existe un segundo tipo."</a:t>
+            </a:r>
+          </a:p>
+          <a:p/>
+          <a:p>
+            <a:r>
+              <a:t>"Y esto importa, porque si yo hacía un dropna para limpiar, me borraba el 48 % del dataset</a:t>
+            </a:r>
+          </a:p>
+          <a:p>
+            <a:r>
+              <a:t>sin ningún motivo. Lo que corresponde es rellenarlo con una categoría que diga «None»."</a:t>
+            </a:r>
+          </a:p>
+          <a:p/>
+          <a:p>
+            <a:r>
               <a:t>— RAREZA 2 —</a:t>
             </a:r>
           </a:p>
           <a:p>
             <a:r>
-              <a:t>"El numeral no es clave primaria: hay 800 filas pero solo 721 números distintos. Las 49</a:t>
-            </a:r>
-          </a:p>
-          <a:p>
-            <a:r>
-              <a:t>formas Mega comparten el número de Pokédex con su forma base: Charizard, Mega Charizard X</a:t>
-            </a:r>
-          </a:p>
-          <a:p>
-            <a:r>
-              <a:t>y Mega Charizard Y son los tres el número 6."</a:t>
+              <a:t>"La segunda: el número de Pokédex no sirve como identificador único. Hay 800 filas pero</a:t>
+            </a:r>
+          </a:p>
+          <a:p>
+            <a:r>
+              <a:t>solo 721 números distintos."</a:t>
             </a:r>
           </a:p>
           <a:p/>
           <a:p>
             <a:r>
-              <a:t>— RAREZA 3 —</a:t>
-            </a:r>
-          </a:p>
-          <a:p>
-            <a:r>
-              <a:t>"Y Total es una columna derivada. Verifiqué que en las 800 filas es exactamente la suma</a:t>
-            </a:r>
-          </a:p>
-          <a:p>
-            <a:r>
-              <a:t>de las seis stats, sin una sola excepción. Por eso en el heatmap correlaciona entre 0,6 y</a:t>
-            </a:r>
-          </a:p>
-          <a:p>
-            <a:r>
-              <a:t>0,75 con todas: no es un hallazgo, es aritmética. Y para modelar, usar Total junto a las</a:t>
-            </a:r>
-          </a:p>
-          <a:p>
-            <a:r>
-              <a:t>seis stats sería multicolinealidad perfecta."</a:t>
+              <a:t>"¿Por qué? Porque las Mega evoluciones se quedaron con el número de la forma original.</a:t>
+            </a:r>
+          </a:p>
+          <a:p>
+            <a:r>
+              <a:t>Por ejemplo, Charizard, Mega Charizard X y Mega Charizard Y son los tres el número 6."</a:t>
+            </a:r>
+          </a:p>
+          <a:p/>
+          <a:p>
+            <a:r>
+              <a:t>— RAREZA 3 (la que más te costó ver) —</a:t>
+            </a:r>
+          </a:p>
+          <a:p>
+            <a:r>
+              <a:t>"Y la tercera, que es la que más me costó darme cuenta: la columna Total no es un dato</a:t>
+            </a:r>
+          </a:p>
+          <a:p>
+            <a:r>
+              <a:t>nuevo, es la suma de las otras seis. Me fijé fila por fila y se cumple en las 800, sin una</a:t>
+            </a:r>
+          </a:p>
+          <a:p>
+            <a:r>
+              <a:t>sola excepción."</a:t>
+            </a:r>
+          </a:p>
+          <a:p/>
+          <a:p>
+            <a:r>
+              <a:t>"Esto me explicó algo que había visto en el trabajo anterior y no entendía: en la matriz</a:t>
+            </a:r>
+          </a:p>
+          <a:p>
+            <a:r>
+              <a:t>de correlación, Total correlacionaba fuerte con todas las stats, entre 0,6 y 0,75. Y no es</a:t>
+            </a:r>
+          </a:p>
+          <a:p>
+            <a:r>
+              <a:t>que haya una relación interesante ahí — es simplemente que es la suma."</a:t>
+            </a:r>
+          </a:p>
+          <a:p/>
+          <a:p>
+            <a:r>
+              <a:t>"Si después quisiera armar un modelo, usar Total junto con las seis stats sería un</a:t>
+            </a:r>
+          </a:p>
+          <a:p>
+            <a:r>
+              <a:t>problema, porque es información repetida."</a:t>
             </a:r>
           </a:p>
           <a:p/>
@@ -810,155 +861,239 @@
           </a:p>
           <a:p>
             <a:r>
-              <a:t>"Para los outliers apliqué la regla del IQR de Tukey con k igual a 1,5: se marca todo lo</a:t>
-            </a:r>
-          </a:p>
-          <a:p>
-            <a:r>
-              <a:t>que caiga fuera de Q1 menos 1,5 por el rango intercuartílico, y Q3 más 1,5. Dieron 52</a:t>
-            </a:r>
-          </a:p>
-          <a:p>
-            <a:r>
-              <a:t>Pokémon, el 6,5 %, outliers en al menos una stat. Ninguna stat individual supera el 2,4 %,</a:t>
-            </a:r>
-          </a:p>
-          <a:p>
-            <a:r>
-              <a:t>lo que descarta errores sistemáticos de carga."</a:t>
+              <a:t>"Bueno, y acá viene la parte que más me interesó."</a:t>
             </a:r>
           </a:p>
           <a:p/>
           <a:p>
             <a:r>
-              <a:t>— EL REMATE (bajá la velocidad acá) —</a:t>
-            </a:r>
-          </a:p>
-          <a:p>
-            <a:r>
-              <a:t>"Pero acá está lo interesante: Total no tiene ningún outlier, aunque sus seis componentes</a:t>
-            </a:r>
-          </a:p>
-          <a:p>
-            <a:r>
-              <a:t>sí tienen."</a:t>
+              <a:t>"Para los outliers usé la regla del IQR. La idea es: agarro el rango entre el primer y el</a:t>
+            </a:r>
+          </a:p>
+          <a:p>
+            <a:r>
+              <a:t>tercer cuartil, lo multiplico por 1,5, y todo lo que quede afuera de eso lo marco como</a:t>
+            </a:r>
+          </a:p>
+          <a:p>
+            <a:r>
+              <a:t>outlier. Es el criterio estándar, el mismo que usa el boxplot para dibujar los puntitos."</a:t>
             </a:r>
           </a:p>
           <a:p/>
           <a:p>
             <a:r>
-              <a:t>"El caso que lo explica es Shuckle: tiene 230 de defensa y 230 de defensa especial, los</a:t>
-            </a:r>
-          </a:p>
-          <a:p>
-            <a:r>
-              <a:t>dos máximos del dataset, pero 5 de velocidad y 10 de ataque. Suma 505, que es un Pokémon</a:t>
-            </a:r>
-          </a:p>
-          <a:p>
-            <a:r>
-              <a:t>del montón."</a:t>
+              <a:t>"Me dieron 52 Pokémon, que es el 6,5 %. Y ninguna stat sola pasa del 2,4 %, así que ahí</a:t>
+            </a:r>
+          </a:p>
+          <a:p>
+            <a:r>
+              <a:t>ya descarté que hubiera errores de carga."</a:t>
             </a:r>
           </a:p>
           <a:p/>
           <a:p>
             <a:r>
-              <a:t>"O sea: los outliers de este dataset no son de poder, son de perfil. El juego reparte un</a:t>
-            </a:r>
-          </a:p>
-          <a:p>
-            <a:r>
-              <a:t>presupuesto fijo de puntos, y si te destacás en algo lo pagás en otra cosa."</a:t>
+              <a:t>— EL REMATE (bajá la velocidad, es lo más importante) —</a:t>
+            </a:r>
+          </a:p>
+          <a:p>
+            <a:r>
+              <a:t>"Pero acá está lo raro, y es lo que me gustaría que se lleven: Total no tiene ni un</a:t>
+            </a:r>
+          </a:p>
+          <a:p>
+            <a:r>
+              <a:t>outlier. Cero. Aunque las seis stats que lo forman sí tienen."</a:t>
             </a:r>
           </a:p>
           <a:p/>
           <a:p>
             <a:r>
-              <a:t>— NATURALEZA —</a:t>
-            </a:r>
-          </a:p>
-          <a:p>
-            <a:r>
-              <a:t>"Después miré quiénes son, porque eso es lo que decide si se eliminan. Shedinja tiene 1 de</a:t>
-            </a:r>
-          </a:p>
-          <a:p>
-            <a:r>
-              <a:t>HP: es el único outlier por debajo del límite en las 800 filas y las seis stats. Y no es</a:t>
-            </a:r>
-          </a:p>
-          <a:p>
-            <a:r>
-              <a:t>un error de carga: en el juego tiene una habilidad que lo hace casi invulnerable, así que</a:t>
-            </a:r>
-          </a:p>
-          <a:p>
-            <a:r>
-              <a:t>le pusieron un punto de vida a propósito. El valor más anómalo del dataset es diseño</a:t>
-            </a:r>
-          </a:p>
-          <a:p>
-            <a:r>
-              <a:t>deliberado."</a:t>
+              <a:t>"Al principio pensé que me había equivocado en el cálculo. Pero cuando fui a ver quiénes</a:t>
+            </a:r>
+          </a:p>
+          <a:p>
+            <a:r>
+              <a:t>eran, entendí."</a:t>
             </a:r>
           </a:p>
           <a:p/>
           <a:p>
             <a:r>
+              <a:t>"El caso que lo explica es Shuckle. Tiene 230 de defensa y 230 de defensa especial: son</a:t>
+            </a:r>
+          </a:p>
+          <a:p>
+            <a:r>
+              <a:t>los dos valores más altos de todo el dataset. Pero tiene 5 de velocidad y 10 de ataque. Y</a:t>
+            </a:r>
+          </a:p>
+          <a:p>
+            <a:r>
+              <a:t>cuando sumás todo te da 505, que es un Pokémon totalmente normal."</a:t>
+            </a:r>
+          </a:p>
+          <a:p/>
+          <a:p>
+            <a:r>
+              <a:t>"O sea, los outliers de este dataset no son Pokémon más poderosos. Son Pokémon</a:t>
+            </a:r>
+          </a:p>
+          <a:p>
+            <a:r>
+              <a:t>desbalanceados. El juego reparte una cantidad fija de puntos, y si sos muy bueno en algo</a:t>
+            </a:r>
+          </a:p>
+          <a:p>
+            <a:r>
+              <a:t>lo pagás siendo muy malo en otra cosa."</a:t>
+            </a:r>
+          </a:p>
+          <a:p/>
+          <a:p>
+            <a:r>
+              <a:t>— NATURALEZA (quiénes son) —</a:t>
+            </a:r>
+          </a:p>
+          <a:p>
+            <a:r>
+              <a:t>"Después me puse a ver quiénes eran, porque eso es lo que decide si los saco o no."</a:t>
+            </a:r>
+          </a:p>
+          <a:p/>
+          <a:p>
+            <a:r>
+              <a:t>"El caso más extremo es Shedinja, que tiene 1 de vida. Es el único que queda por debajo</a:t>
+            </a:r>
+          </a:p>
+          <a:p>
+            <a:r>
+              <a:t>del límite en las 800 filas y en las seis stats. Y cuando lo busqué, resulta que no es un</a:t>
+            </a:r>
+          </a:p>
+          <a:p>
+            <a:r>
+              <a:t>error: en el juego tiene una habilidad que lo hace casi invulnerable, entonces le pusieron</a:t>
+            </a:r>
+          </a:p>
+          <a:p>
+            <a:r>
+              <a:t>1 de vida a propósito, para compensar."</a:t>
+            </a:r>
+          </a:p>
+          <a:p/>
+          <a:p>
+            <a:r>
+              <a:t>"Me pareció interesante eso: el dato más raro de todo el dataset está puesto ahí a</a:t>
+            </a:r>
+          </a:p>
+          <a:p>
+            <a:r>
+              <a:t>propósito."</a:t>
+            </a:r>
+          </a:p>
+          <a:p/>
+          <a:p>
+            <a:r>
               <a:t>— LA DECISIÓN —</a:t>
             </a:r>
           </a:p>
           <a:p>
             <a:r>
-              <a:t>"Por eso no los elimino. El 36,5 % de los outliers son legendarios, cuando en el dataset</a:t>
-            </a:r>
-          </a:p>
-          <a:p>
-            <a:r>
-              <a:t>entero son el 8,1 %: están 4,5 veces sobrerrepresentados. Ser extremo es lo que define a</a:t>
-            </a:r>
-          </a:p>
-          <a:p>
-            <a:r>
-              <a:t>un legendario. Si los borrara perdería 19 de los 65, el 29 % de la clase minoritaria."</a:t>
+              <a:t>"Y por eso decidí no eliminarlos. Por dos razones."</a:t>
             </a:r>
           </a:p>
           <a:p/>
           <a:p>
             <a:r>
-              <a:t>"Acá el outlier es la señal, no el ruido."</a:t>
+              <a:t>"Una, que ya la dije: no son errores, son casos reales."</a:t>
             </a:r>
           </a:p>
           <a:p/>
           <a:p>
             <a:r>
+              <a:t>"Y la otra, que me parece más fuerte: el 36,5 % de los outliers son legendarios, cuando en</a:t>
+            </a:r>
+          </a:p>
+          <a:p>
+            <a:r>
+              <a:t>el dataset entero los legendarios son el 8,1 %. O sea que están sobrerrepresentados cuatro</a:t>
+            </a:r>
+          </a:p>
+          <a:p>
+            <a:r>
+              <a:t>veces y media. Ser extremo es justamente lo que hace que un Pokémon sea legendario."</a:t>
+            </a:r>
+          </a:p>
+          <a:p/>
+          <a:p>
+            <a:r>
+              <a:t>"Si yo los borraba, me quedaba sin 19 de los 65 legendarios. Casi un tercio. Y en un</a:t>
+            </a:r>
+          </a:p>
+          <a:p>
+            <a:r>
+              <a:t>dataset que ya venía desbalanceado."</a:t>
+            </a:r>
+          </a:p>
+          <a:p/>
+          <a:p>
+            <a:r>
+              <a:t>"Así que acá el outlier no es ruido, es la señal."</a:t>
+            </a:r>
+          </a:p>
+          <a:p/>
+          <a:p>
+            <a:r>
               <a:t>— CIERRE —</a:t>
             </a:r>
           </a:p>
           <a:p>
             <a:r>
-              <a:t>"Y esa es la conclusión general: este dataset no tiene problemas de calidad, tiene</a:t>
-            </a:r>
-          </a:p>
-          <a:p>
-            <a:r>
-              <a:t>desafíos de estructura. Multicolinealidad, alta cardinalidad en los tipos, desbalance de</a:t>
-            </a:r>
-          </a:p>
-          <a:p>
-            <a:r>
-              <a:t>clase y casi-duplicados por las formas alternativas. Por eso las técnicas que propongo son</a:t>
-            </a:r>
-          </a:p>
-          <a:p>
-            <a:r>
-              <a:t>RobustScaler, split agrupado por número de Pokédex, y stratify con métricas F1 o recall."</a:t>
+              <a:t>"Y para cerrar: lo que aprendí de este dataset es que no tiene problemas de calidad, tiene</a:t>
+            </a:r>
+          </a:p>
+          <a:p>
+            <a:r>
+              <a:t>problemas de estructura. No hay datos mal cargados. Lo que hay es información repetida,</a:t>
+            </a:r>
+          </a:p>
+          <a:p>
+            <a:r>
+              <a:t>categorías con muy pocos casos, una clase desbalanceada, y filas que son casi duplicadas</a:t>
+            </a:r>
+          </a:p>
+          <a:p>
+            <a:r>
+              <a:t>entre sí."</a:t>
             </a:r>
           </a:p>
           <a:p/>
           <a:p>
             <a:r>
-              <a:t>"Gracias, quedo para preguntas."</a:t>
+              <a:t>"Por eso las técnicas que propondría son: escalar con RobustScaler, que usa la mediana en</a:t>
+            </a:r>
+          </a:p>
+          <a:p>
+            <a:r>
+              <a:t>vez del promedio; separar train y test agrupando por número de Pokédex, para que un</a:t>
+            </a:r>
+          </a:p>
+          <a:p>
+            <a:r>
+              <a:t>Pokémon y su Mega no queden de lados distintos; y usar F1 o recall en vez de accuracy, por</a:t>
+            </a:r>
+          </a:p>
+          <a:p>
+            <a:r>
+              <a:t>el desbalance."</a:t>
+            </a:r>
+          </a:p>
+          <a:p/>
+          <a:p>
+            <a:r>
+              <a:t>"Eso es todo. Gracias."</a:t>
             </a:r>
           </a:p>
         </p:txBody>
